--- a/chapter4/parts/part-05-tools-for-annotation/clip.pptx
+++ b/chapter4/parts/part-05-tools-for-annotation/clip.pptx
@@ -4171,7 +4171,7 @@
               </a:defRPr>
             </a:pPr>
             <a:r>
-              <a:t>Chapter 4 — 05 Tools For Annotation</a:t>
+              <a:t>Chapter 4 — Tools For Annotation</a:t>
             </a:r>
           </a:p>
         </p:txBody>
@@ -4330,7 +4330,7 @@
               </a:defRPr>
             </a:pPr>
             <a:r>
-              <a:t>Chapter 4 — 05 Tools For Annotation</a:t>
+              <a:t>Chapter 4 — Tools For Annotation</a:t>
             </a:r>
           </a:p>
         </p:txBody>
@@ -4529,7 +4529,7 @@
               </a:defRPr>
             </a:pPr>
             <a:r>
-              <a:t>Chapter 4 — 05 Tools For Annotation</a:t>
+              <a:t>Chapter 4 — Tools For Annotation</a:t>
             </a:r>
           </a:p>
         </p:txBody>
@@ -4748,7 +4748,7 @@
               </a:defRPr>
             </a:pPr>
             <a:r>
-              <a:t>Chapter 4 — 05 Tools For Annotation</a:t>
+              <a:t>Chapter 4 — Tools For Annotation</a:t>
             </a:r>
           </a:p>
         </p:txBody>
@@ -4947,7 +4947,7 @@
               </a:defRPr>
             </a:pPr>
             <a:r>
-              <a:t>Chapter 4 — 05 Tools For Annotation</a:t>
+              <a:t>Chapter 4 — Tools For Annotation</a:t>
             </a:r>
           </a:p>
         </p:txBody>
@@ -5186,7 +5186,7 @@
               </a:defRPr>
             </a:pPr>
             <a:r>
-              <a:t>Chapter 4 — 05 Tools For Annotation</a:t>
+              <a:t>Chapter 4 — Tools For Annotation</a:t>
             </a:r>
           </a:p>
         </p:txBody>
@@ -5365,7 +5365,7 @@
               </a:defRPr>
             </a:pPr>
             <a:r>
-              <a:t>Chapter 4 — 05 Tools For Annotation</a:t>
+              <a:t>Chapter 4 — Tools For Annotation</a:t>
             </a:r>
           </a:p>
         </p:txBody>
@@ -5544,7 +5544,7 @@
               </a:defRPr>
             </a:pPr>
             <a:r>
-              <a:t>Chapter 4 — 05 Tools For Annotation</a:t>
+              <a:t>Chapter 4 — Tools For Annotation</a:t>
             </a:r>
           </a:p>
         </p:txBody>
@@ -5703,7 +5703,7 @@
               </a:defRPr>
             </a:pPr>
             <a:r>
-              <a:t>Chapter 4 — 05 Tools For Annotation</a:t>
+              <a:t>Chapter 4 — Tools For Annotation</a:t>
             </a:r>
           </a:p>
         </p:txBody>

--- a/chapter4/parts/part-05-tools-for-annotation/clip.pptx
+++ b/chapter4/parts/part-05-tools-for-annotation/clip.pptx
@@ -4255,10 +4255,12 @@
           </a:bodyPr>
           <a:lstStyle/>
           <a:p>
-            <a:pPr>
+            <a:pPr lvl="0" marL="457200" indent="-228600">
+              <a:buFont typeface="Calibri"/>
               <a:spcAft>
                 <a:spcPts val="1000"/>
               </a:spcAft>
+              <a:buSzPct val="100000"/>
               <a:buChar char="•"/>
               <a:lnSpc>
                 <a:spcPts val="2200"/>
@@ -4275,10 +4277,12 @@
             </a:r>
           </a:p>
           <a:p>
-            <a:pPr>
+            <a:pPr lvl="0" marL="457200" indent="-228600">
+              <a:buFont typeface="Calibri"/>
               <a:spcAft>
                 <a:spcPts val="1000"/>
               </a:spcAft>
+              <a:buSzPct val="100000"/>
               <a:buChar char="•"/>
               <a:lnSpc>
                 <a:spcPts val="2200"/>
@@ -4414,10 +4418,12 @@
           </a:bodyPr>
           <a:lstStyle/>
           <a:p>
-            <a:pPr>
+            <a:pPr lvl="0" marL="457200" indent="-228600">
+              <a:buFont typeface="Calibri"/>
               <a:spcAft>
                 <a:spcPts val="1000"/>
               </a:spcAft>
+              <a:buSzPct val="100000"/>
               <a:buChar char="•"/>
               <a:lnSpc>
                 <a:spcPts val="2200"/>
@@ -4434,10 +4440,12 @@
             </a:r>
           </a:p>
           <a:p>
-            <a:pPr>
+            <a:pPr lvl="0" marL="457200" indent="-228600">
+              <a:buFont typeface="Calibri"/>
               <a:spcAft>
                 <a:spcPts val="1000"/>
               </a:spcAft>
+              <a:buSzPct val="100000"/>
               <a:buChar char="•"/>
               <a:lnSpc>
                 <a:spcPts val="2200"/>
@@ -4454,10 +4462,12 @@
             </a:r>
           </a:p>
           <a:p>
-            <a:pPr>
+            <a:pPr lvl="0" marL="457200" indent="-228600">
+              <a:buFont typeface="Calibri"/>
               <a:spcAft>
                 <a:spcPts val="1000"/>
               </a:spcAft>
+              <a:buSzPct val="100000"/>
               <a:buChar char="•"/>
               <a:lnSpc>
                 <a:spcPts val="2200"/>
@@ -4474,10 +4484,12 @@
             </a:r>
           </a:p>
           <a:p>
-            <a:pPr>
+            <a:pPr lvl="0" marL="457200" indent="-228600">
+              <a:buFont typeface="Calibri"/>
               <a:spcAft>
                 <a:spcPts val="1000"/>
               </a:spcAft>
+              <a:buSzPct val="100000"/>
               <a:buChar char="•"/>
               <a:lnSpc>
                 <a:spcPts val="2200"/>
@@ -4613,10 +4625,12 @@
           </a:bodyPr>
           <a:lstStyle/>
           <a:p>
-            <a:pPr>
+            <a:pPr lvl="0" marL="457200" indent="-228600">
+              <a:buFont typeface="Calibri"/>
               <a:spcAft>
                 <a:spcPts val="1000"/>
               </a:spcAft>
+              <a:buSzPct val="100000"/>
               <a:buChar char="•"/>
               <a:lnSpc>
                 <a:spcPts val="2200"/>
@@ -4633,10 +4647,12 @@
             </a:r>
           </a:p>
           <a:p>
-            <a:pPr>
+            <a:pPr lvl="0" marL="457200" indent="-228600">
+              <a:buFont typeface="Calibri"/>
               <a:spcAft>
                 <a:spcPts val="1000"/>
               </a:spcAft>
+              <a:buSzPct val="100000"/>
               <a:buChar char="•"/>
               <a:lnSpc>
                 <a:spcPts val="2200"/>
@@ -4653,10 +4669,12 @@
             </a:r>
           </a:p>
           <a:p>
-            <a:pPr>
+            <a:pPr lvl="0" marL="457200" indent="-228600">
+              <a:buFont typeface="Calibri"/>
               <a:spcAft>
                 <a:spcPts val="1000"/>
               </a:spcAft>
+              <a:buSzPct val="100000"/>
               <a:buChar char="•"/>
               <a:lnSpc>
                 <a:spcPts val="2200"/>
@@ -4673,10 +4691,12 @@
             </a:r>
           </a:p>
           <a:p>
-            <a:pPr>
+            <a:pPr lvl="0" marL="457200" indent="-228600">
+              <a:buFont typeface="Calibri"/>
               <a:spcAft>
                 <a:spcPts val="1000"/>
               </a:spcAft>
+              <a:buSzPct val="100000"/>
               <a:buChar char="•"/>
               <a:lnSpc>
                 <a:spcPts val="2200"/>
@@ -4693,10 +4713,12 @@
             </a:r>
           </a:p>
           <a:p>
-            <a:pPr>
+            <a:pPr lvl="0" marL="457200" indent="-228600">
+              <a:buFont typeface="Calibri"/>
               <a:spcAft>
                 <a:spcPts val="1000"/>
               </a:spcAft>
+              <a:buSzPct val="100000"/>
               <a:buChar char="•"/>
               <a:lnSpc>
                 <a:spcPts val="2200"/>
@@ -4832,10 +4854,12 @@
           </a:bodyPr>
           <a:lstStyle/>
           <a:p>
-            <a:pPr>
+            <a:pPr lvl="0" marL="457200" indent="-228600">
+              <a:buFont typeface="Calibri"/>
               <a:spcAft>
                 <a:spcPts val="1000"/>
               </a:spcAft>
+              <a:buSzPct val="100000"/>
               <a:buChar char="•"/>
               <a:lnSpc>
                 <a:spcPts val="2200"/>
@@ -4852,10 +4876,12 @@
             </a:r>
           </a:p>
           <a:p>
-            <a:pPr>
+            <a:pPr lvl="0" marL="457200" indent="-228600">
+              <a:buFont typeface="Calibri"/>
               <a:spcAft>
                 <a:spcPts val="1000"/>
               </a:spcAft>
+              <a:buSzPct val="100000"/>
               <a:buChar char="•"/>
               <a:lnSpc>
                 <a:spcPts val="2200"/>
@@ -4872,10 +4898,12 @@
             </a:r>
           </a:p>
           <a:p>
-            <a:pPr>
+            <a:pPr lvl="0" marL="457200" indent="-228600">
+              <a:buFont typeface="Calibri"/>
               <a:spcAft>
                 <a:spcPts val="1000"/>
               </a:spcAft>
+              <a:buSzPct val="100000"/>
               <a:buChar char="•"/>
               <a:lnSpc>
                 <a:spcPts val="2200"/>
@@ -4892,10 +4920,12 @@
             </a:r>
           </a:p>
           <a:p>
-            <a:pPr>
+            <a:pPr lvl="0" marL="457200" indent="-228600">
+              <a:buFont typeface="Calibri"/>
               <a:spcAft>
                 <a:spcPts val="1000"/>
               </a:spcAft>
+              <a:buSzPct val="100000"/>
               <a:buChar char="•"/>
               <a:lnSpc>
                 <a:spcPts val="2200"/>
@@ -5031,10 +5061,12 @@
           </a:bodyPr>
           <a:lstStyle/>
           <a:p>
-            <a:pPr>
+            <a:pPr lvl="0" marL="457200" indent="-228600">
+              <a:buFont typeface="Calibri"/>
               <a:spcAft>
                 <a:spcPts val="1000"/>
               </a:spcAft>
+              <a:buSzPct val="100000"/>
               <a:buChar char="•"/>
               <a:lnSpc>
                 <a:spcPts val="2200"/>
@@ -5051,10 +5083,12 @@
             </a:r>
           </a:p>
           <a:p>
-            <a:pPr>
+            <a:pPr lvl="0" marL="457200" indent="-228600">
+              <a:buFont typeface="Calibri"/>
               <a:spcAft>
                 <a:spcPts val="1000"/>
               </a:spcAft>
+              <a:buSzPct val="100000"/>
               <a:buChar char="•"/>
               <a:lnSpc>
                 <a:spcPts val="2200"/>
@@ -5071,10 +5105,12 @@
             </a:r>
           </a:p>
           <a:p>
-            <a:pPr>
+            <a:pPr lvl="0" marL="457200" indent="-228600">
+              <a:buFont typeface="Calibri"/>
               <a:spcAft>
                 <a:spcPts val="1000"/>
               </a:spcAft>
+              <a:buSzPct val="100000"/>
               <a:buChar char="•"/>
               <a:lnSpc>
                 <a:spcPts val="2200"/>
@@ -5091,10 +5127,12 @@
             </a:r>
           </a:p>
           <a:p>
-            <a:pPr>
+            <a:pPr lvl="0" marL="457200" indent="-228600">
+              <a:buFont typeface="Calibri"/>
               <a:spcAft>
                 <a:spcPts val="1000"/>
               </a:spcAft>
+              <a:buSzPct val="100000"/>
               <a:buChar char="•"/>
               <a:lnSpc>
                 <a:spcPts val="2200"/>
@@ -5111,10 +5149,12 @@
             </a:r>
           </a:p>
           <a:p>
-            <a:pPr>
+            <a:pPr lvl="0" marL="457200" indent="-228600">
+              <a:buFont typeface="Calibri"/>
               <a:spcAft>
                 <a:spcPts val="1000"/>
               </a:spcAft>
+              <a:buSzPct val="100000"/>
               <a:buChar char="•"/>
               <a:lnSpc>
                 <a:spcPts val="2200"/>
@@ -5131,10 +5171,12 @@
             </a:r>
           </a:p>
           <a:p>
-            <a:pPr>
+            <a:pPr lvl="0" marL="457200" indent="-228600">
+              <a:buFont typeface="Calibri"/>
               <a:spcAft>
                 <a:spcPts val="1000"/>
               </a:spcAft>
+              <a:buSzPct val="100000"/>
               <a:buChar char="•"/>
               <a:lnSpc>
                 <a:spcPts val="2200"/>
@@ -5270,10 +5312,12 @@
           </a:bodyPr>
           <a:lstStyle/>
           <a:p>
-            <a:pPr>
+            <a:pPr lvl="0" marL="457200" indent="-228600">
+              <a:buFont typeface="Calibri"/>
               <a:spcAft>
                 <a:spcPts val="1000"/>
               </a:spcAft>
+              <a:buSzPct val="100000"/>
               <a:buChar char="•"/>
               <a:lnSpc>
                 <a:spcPts val="2200"/>
@@ -5290,10 +5334,12 @@
             </a:r>
           </a:p>
           <a:p>
-            <a:pPr>
+            <a:pPr lvl="0" marL="457200" indent="-228600">
+              <a:buFont typeface="Calibri"/>
               <a:spcAft>
                 <a:spcPts val="1000"/>
               </a:spcAft>
+              <a:buSzPct val="100000"/>
               <a:buChar char="•"/>
               <a:lnSpc>
                 <a:spcPts val="2200"/>
@@ -5310,10 +5356,12 @@
             </a:r>
           </a:p>
           <a:p>
-            <a:pPr>
+            <a:pPr lvl="0" marL="457200" indent="-228600">
+              <a:buFont typeface="Calibri"/>
               <a:spcAft>
                 <a:spcPts val="1000"/>
               </a:spcAft>
+              <a:buSzPct val="100000"/>
               <a:buChar char="•"/>
               <a:lnSpc>
                 <a:spcPts val="2200"/>
@@ -5449,10 +5497,12 @@
           </a:bodyPr>
           <a:lstStyle/>
           <a:p>
-            <a:pPr>
+            <a:pPr lvl="0" marL="457200" indent="-228600">
+              <a:buFont typeface="Calibri"/>
               <a:spcAft>
                 <a:spcPts val="1000"/>
               </a:spcAft>
+              <a:buSzPct val="100000"/>
               <a:buChar char="•"/>
               <a:lnSpc>
                 <a:spcPts val="2200"/>
@@ -5469,10 +5519,12 @@
             </a:r>
           </a:p>
           <a:p>
-            <a:pPr>
+            <a:pPr lvl="0" marL="457200" indent="-228600">
+              <a:buFont typeface="Calibri"/>
               <a:spcAft>
                 <a:spcPts val="1000"/>
               </a:spcAft>
+              <a:buSzPct val="100000"/>
               <a:buChar char="•"/>
               <a:lnSpc>
                 <a:spcPts val="2200"/>
@@ -5489,10 +5541,12 @@
             </a:r>
           </a:p>
           <a:p>
-            <a:pPr>
+            <a:pPr lvl="0" marL="457200" indent="-228600">
+              <a:buFont typeface="Calibri"/>
               <a:spcAft>
                 <a:spcPts val="1000"/>
               </a:spcAft>
+              <a:buSzPct val="100000"/>
               <a:buChar char="•"/>
               <a:lnSpc>
                 <a:spcPts val="2200"/>
@@ -5628,10 +5682,12 @@
           </a:bodyPr>
           <a:lstStyle/>
           <a:p>
-            <a:pPr>
+            <a:pPr lvl="0" marL="457200" indent="-228600">
+              <a:buFont typeface="Calibri"/>
               <a:spcAft>
                 <a:spcPts val="1000"/>
               </a:spcAft>
+              <a:buSzPct val="100000"/>
               <a:buChar char="•"/>
               <a:lnSpc>
                 <a:spcPts val="2200"/>
@@ -5648,10 +5704,12 @@
             </a:r>
           </a:p>
           <a:p>
-            <a:pPr>
+            <a:pPr lvl="0" marL="457200" indent="-228600">
+              <a:buFont typeface="Calibri"/>
               <a:spcAft>
                 <a:spcPts val="1000"/>
               </a:spcAft>
+              <a:buSzPct val="100000"/>
               <a:buChar char="•"/>
               <a:lnSpc>
                 <a:spcPts val="2200"/>
